--- a/progress.pptx
+++ b/progress.pptx
@@ -5,7 +5,7 @@
     <p:sldMasterId id="2147483648" r:id="rId1"/>
   </p:sldMasterIdLst>
   <p:notesMasterIdLst>
-    <p:notesMasterId r:id="rId10"/>
+    <p:notesMasterId r:id="rId13"/>
   </p:notesMasterIdLst>
   <p:sldIdLst>
     <p:sldId id="261" r:id="rId2"/>
@@ -16,6 +16,9 @@
     <p:sldId id="265" r:id="rId7"/>
     <p:sldId id="267" r:id="rId8"/>
     <p:sldId id="268" r:id="rId9"/>
+    <p:sldId id="269" r:id="rId10"/>
+    <p:sldId id="270" r:id="rId11"/>
+    <p:sldId id="271" r:id="rId12"/>
   </p:sldIdLst>
   <p:sldSz cx="12192000" cy="6858000"/>
   <p:notesSz cx="6858000" cy="9144000"/>
@@ -114,6 +117,11 @@
       </a:defRPr>
     </a:lvl9pPr>
   </p:defaultTextStyle>
+  <p:extLst>
+    <p:ext uri="{EFAFB233-063F-42B5-8137-9DF3F51BA10A}">
+      <p15:sldGuideLst xmlns:p15="http://schemas.microsoft.com/office/powerpoint/2012/main"/>
+    </p:ext>
+  </p:extLst>
 </p:presentation>
 </file>
 
@@ -199,7 +207,7 @@
           <a:p>
             <a:fld id="{391F0B43-6B19-1044-8D4F-E46BB78FCD8B}" type="datetimeFigureOut">
               <a:rPr lang="de-DE" smtClean="0"/>
-              <a:t>16.01.25</a:t>
+              <a:t>19.01.25</a:t>
             </a:fld>
             <a:endParaRPr lang="de-DE"/>
           </a:p>
@@ -882,7 +890,7 @@
           <a:p>
             <a:fld id="{B202D3EB-434C-7940-89BB-2B1A6C02241D}" type="datetimeFigureOut">
               <a:rPr lang="de-DE" smtClean="0"/>
-              <a:t>16.01.25</a:t>
+              <a:t>19.01.25</a:t>
             </a:fld>
             <a:endParaRPr lang="de-DE"/>
           </a:p>
@@ -1080,7 +1088,7 @@
           <a:p>
             <a:fld id="{B202D3EB-434C-7940-89BB-2B1A6C02241D}" type="datetimeFigureOut">
               <a:rPr lang="de-DE" smtClean="0"/>
-              <a:t>16.01.25</a:t>
+              <a:t>19.01.25</a:t>
             </a:fld>
             <a:endParaRPr lang="de-DE"/>
           </a:p>
@@ -1288,7 +1296,7 @@
           <a:p>
             <a:fld id="{B202D3EB-434C-7940-89BB-2B1A6C02241D}" type="datetimeFigureOut">
               <a:rPr lang="de-DE" smtClean="0"/>
-              <a:t>16.01.25</a:t>
+              <a:t>19.01.25</a:t>
             </a:fld>
             <a:endParaRPr lang="de-DE"/>
           </a:p>
@@ -1486,7 +1494,7 @@
           <a:p>
             <a:fld id="{B202D3EB-434C-7940-89BB-2B1A6C02241D}" type="datetimeFigureOut">
               <a:rPr lang="de-DE" smtClean="0"/>
-              <a:t>16.01.25</a:t>
+              <a:t>19.01.25</a:t>
             </a:fld>
             <a:endParaRPr lang="de-DE"/>
           </a:p>
@@ -1761,7 +1769,7 @@
           <a:p>
             <a:fld id="{B202D3EB-434C-7940-89BB-2B1A6C02241D}" type="datetimeFigureOut">
               <a:rPr lang="de-DE" smtClean="0"/>
-              <a:t>16.01.25</a:t>
+              <a:t>19.01.25</a:t>
             </a:fld>
             <a:endParaRPr lang="de-DE"/>
           </a:p>
@@ -2026,7 +2034,7 @@
           <a:p>
             <a:fld id="{B202D3EB-434C-7940-89BB-2B1A6C02241D}" type="datetimeFigureOut">
               <a:rPr lang="de-DE" smtClean="0"/>
-              <a:t>16.01.25</a:t>
+              <a:t>19.01.25</a:t>
             </a:fld>
             <a:endParaRPr lang="de-DE"/>
           </a:p>
@@ -2438,7 +2446,7 @@
           <a:p>
             <a:fld id="{B202D3EB-434C-7940-89BB-2B1A6C02241D}" type="datetimeFigureOut">
               <a:rPr lang="de-DE" smtClean="0"/>
-              <a:t>16.01.25</a:t>
+              <a:t>19.01.25</a:t>
             </a:fld>
             <a:endParaRPr lang="de-DE"/>
           </a:p>
@@ -2579,7 +2587,7 @@
           <a:p>
             <a:fld id="{B202D3EB-434C-7940-89BB-2B1A6C02241D}" type="datetimeFigureOut">
               <a:rPr lang="de-DE" smtClean="0"/>
-              <a:t>16.01.25</a:t>
+              <a:t>19.01.25</a:t>
             </a:fld>
             <a:endParaRPr lang="de-DE"/>
           </a:p>
@@ -2692,7 +2700,7 @@
           <a:p>
             <a:fld id="{B202D3EB-434C-7940-89BB-2B1A6C02241D}" type="datetimeFigureOut">
               <a:rPr lang="de-DE" smtClean="0"/>
-              <a:t>16.01.25</a:t>
+              <a:t>19.01.25</a:t>
             </a:fld>
             <a:endParaRPr lang="de-DE"/>
           </a:p>
@@ -3003,7 +3011,7 @@
           <a:p>
             <a:fld id="{B202D3EB-434C-7940-89BB-2B1A6C02241D}" type="datetimeFigureOut">
               <a:rPr lang="de-DE" smtClean="0"/>
-              <a:t>16.01.25</a:t>
+              <a:t>19.01.25</a:t>
             </a:fld>
             <a:endParaRPr lang="de-DE"/>
           </a:p>
@@ -3291,7 +3299,7 @@
           <a:p>
             <a:fld id="{B202D3EB-434C-7940-89BB-2B1A6C02241D}" type="datetimeFigureOut">
               <a:rPr lang="de-DE" smtClean="0"/>
-              <a:t>16.01.25</a:t>
+              <a:t>19.01.25</a:t>
             </a:fld>
             <a:endParaRPr lang="de-DE"/>
           </a:p>
@@ -3532,7 +3540,7 @@
           <a:p>
             <a:fld id="{B202D3EB-434C-7940-89BB-2B1A6C02241D}" type="datetimeFigureOut">
               <a:rPr lang="de-DE" smtClean="0"/>
-              <a:t>16.01.25</a:t>
+              <a:t>19.01.25</a:t>
             </a:fld>
             <a:endParaRPr lang="de-DE"/>
           </a:p>
@@ -4946,6 +4954,156 @@
 </p:sld>
 </file>
 
+<file path=ppt/slides/slide10.xml><?xml version="1.0" encoding="utf-8"?>
+<p:sld xmlns:a="http://schemas.openxmlformats.org/drawingml/2006/main" xmlns:r="http://schemas.openxmlformats.org/officeDocument/2006/relationships" xmlns:p="http://schemas.openxmlformats.org/presentationml/2006/main">
+  <p:cSld>
+    <p:spTree>
+      <p:nvGrpSpPr>
+        <p:cNvPr id="1" name=""/>
+        <p:cNvGrpSpPr/>
+        <p:nvPr/>
+      </p:nvGrpSpPr>
+      <p:grpSpPr>
+        <a:xfrm>
+          <a:off x="0" y="0"/>
+          <a:ext cx="0" cy="0"/>
+          <a:chOff x="0" y="0"/>
+          <a:chExt cx="0" cy="0"/>
+        </a:xfrm>
+      </p:grpSpPr>
+      <p:pic>
+        <p:nvPicPr>
+          <p:cNvPr id="3" name="Grafik 2">
+            <a:extLst>
+              <a:ext uri="{FF2B5EF4-FFF2-40B4-BE49-F238E27FC236}">
+                <a16:creationId xmlns:a16="http://schemas.microsoft.com/office/drawing/2014/main" id="{B074F2C8-1AD1-4F4F-E716-0D32A560C935}"/>
+              </a:ext>
+            </a:extLst>
+          </p:cNvPr>
+          <p:cNvPicPr>
+            <a:picLocks noChangeAspect="1"/>
+          </p:cNvPicPr>
+          <p:nvPr/>
+        </p:nvPicPr>
+        <p:blipFill>
+          <a:blip r:embed="rId2"/>
+          <a:stretch>
+            <a:fillRect/>
+          </a:stretch>
+        </p:blipFill>
+        <p:spPr>
+          <a:xfrm>
+            <a:off x="1098549" y="723624"/>
+            <a:ext cx="9531351" cy="5410752"/>
+          </a:xfrm>
+          <a:prstGeom prst="rect">
+            <a:avLst/>
+          </a:prstGeom>
+        </p:spPr>
+      </p:pic>
+    </p:spTree>
+    <p:extLst>
+      <p:ext uri="{BB962C8B-B14F-4D97-AF65-F5344CB8AC3E}">
+        <p14:creationId xmlns:p14="http://schemas.microsoft.com/office/powerpoint/2010/main" val="2990666644"/>
+      </p:ext>
+    </p:extLst>
+  </p:cSld>
+  <p:clrMapOvr>
+    <a:masterClrMapping/>
+  </p:clrMapOvr>
+</p:sld>
+</file>
+
+<file path=ppt/slides/slide11.xml><?xml version="1.0" encoding="utf-8"?>
+<p:sld xmlns:a="http://schemas.openxmlformats.org/drawingml/2006/main" xmlns:r="http://schemas.openxmlformats.org/officeDocument/2006/relationships" xmlns:p="http://schemas.openxmlformats.org/presentationml/2006/main">
+  <p:cSld>
+    <p:spTree>
+      <p:nvGrpSpPr>
+        <p:cNvPr id="1" name=""/>
+        <p:cNvGrpSpPr/>
+        <p:nvPr/>
+      </p:nvGrpSpPr>
+      <p:grpSpPr>
+        <a:xfrm>
+          <a:off x="0" y="0"/>
+          <a:ext cx="0" cy="0"/>
+          <a:chOff x="0" y="0"/>
+          <a:chExt cx="0" cy="0"/>
+        </a:xfrm>
+      </p:grpSpPr>
+      <p:pic>
+        <p:nvPicPr>
+          <p:cNvPr id="3" name="Grafik 2">
+            <a:extLst>
+              <a:ext uri="{FF2B5EF4-FFF2-40B4-BE49-F238E27FC236}">
+                <a16:creationId xmlns:a16="http://schemas.microsoft.com/office/drawing/2014/main" id="{DD35B781-7B6D-C28C-3991-30F98B3539DB}"/>
+              </a:ext>
+            </a:extLst>
+          </p:cNvPr>
+          <p:cNvPicPr>
+            <a:picLocks noChangeAspect="1"/>
+          </p:cNvPicPr>
+          <p:nvPr/>
+        </p:nvPicPr>
+        <p:blipFill>
+          <a:blip r:embed="rId2"/>
+          <a:stretch>
+            <a:fillRect/>
+          </a:stretch>
+        </p:blipFill>
+        <p:spPr>
+          <a:xfrm>
+            <a:off x="0" y="1638299"/>
+            <a:ext cx="6308842" cy="3581400"/>
+          </a:xfrm>
+          <a:prstGeom prst="rect">
+            <a:avLst/>
+          </a:prstGeom>
+        </p:spPr>
+      </p:pic>
+      <p:pic>
+        <p:nvPicPr>
+          <p:cNvPr id="5" name="Grafik 4">
+            <a:extLst>
+              <a:ext uri="{FF2B5EF4-FFF2-40B4-BE49-F238E27FC236}">
+                <a16:creationId xmlns:a16="http://schemas.microsoft.com/office/drawing/2014/main" id="{32D2EE99-7B04-08F6-E8D0-672A73F2E082}"/>
+              </a:ext>
+            </a:extLst>
+          </p:cNvPr>
+          <p:cNvPicPr>
+            <a:picLocks noChangeAspect="1"/>
+          </p:cNvPicPr>
+          <p:nvPr/>
+        </p:nvPicPr>
+        <p:blipFill>
+          <a:blip r:embed="rId3"/>
+          <a:stretch>
+            <a:fillRect/>
+          </a:stretch>
+        </p:blipFill>
+        <p:spPr>
+          <a:xfrm>
+            <a:off x="6308842" y="1803759"/>
+            <a:ext cx="5725906" cy="3250479"/>
+          </a:xfrm>
+          <a:prstGeom prst="rect">
+            <a:avLst/>
+          </a:prstGeom>
+        </p:spPr>
+      </p:pic>
+    </p:spTree>
+    <p:extLst>
+      <p:ext uri="{BB962C8B-B14F-4D97-AF65-F5344CB8AC3E}">
+        <p14:creationId xmlns:p14="http://schemas.microsoft.com/office/powerpoint/2010/main" val="3152487584"/>
+      </p:ext>
+    </p:extLst>
+  </p:cSld>
+  <p:clrMapOvr>
+    <a:masterClrMapping/>
+  </p:clrMapOvr>
+</p:sld>
+</file>
+
 <file path=ppt/slides/slide2.xml><?xml version="1.0" encoding="utf-8"?>
 <p:sld xmlns:a="http://schemas.openxmlformats.org/drawingml/2006/main" xmlns:r="http://schemas.openxmlformats.org/officeDocument/2006/relationships" xmlns:p="http://schemas.openxmlformats.org/presentationml/2006/main">
   <p:cSld>
@@ -6822,10 +6980,10 @@
       </p:sp>
       <p:pic>
         <p:nvPicPr>
-          <p:cNvPr id="6" name="Grafik 5">
-            <a:extLst>
-              <a:ext uri="{FF2B5EF4-FFF2-40B4-BE49-F238E27FC236}">
-                <a16:creationId xmlns:a16="http://schemas.microsoft.com/office/drawing/2014/main" id="{D31D0649-0C28-8F37-1E92-B0AC57D1433C}"/>
+          <p:cNvPr id="3" name="Grafik 2">
+            <a:extLst>
+              <a:ext uri="{FF2B5EF4-FFF2-40B4-BE49-F238E27FC236}">
+                <a16:creationId xmlns:a16="http://schemas.microsoft.com/office/drawing/2014/main" id="{61330D9E-A95C-0DAA-E255-03A891C607F3}"/>
               </a:ext>
             </a:extLst>
           </p:cNvPr>
@@ -6842,8 +7000,8 @@
         </p:blipFill>
         <p:spPr>
           <a:xfrm>
-            <a:off x="328529" y="740943"/>
-            <a:ext cx="9525334" cy="5628055"/>
+            <a:off x="427037" y="773295"/>
+            <a:ext cx="10302876" cy="5848731"/>
           </a:xfrm>
           <a:prstGeom prst="rect">
             <a:avLst/>
@@ -6880,10 +7038,194 @@
           <a:chExt cx="0" cy="0"/>
         </a:xfrm>
       </p:grpSpPr>
+      <p:pic>
+        <p:nvPicPr>
+          <p:cNvPr id="3" name="Grafik 2">
+            <a:extLst>
+              <a:ext uri="{FF2B5EF4-FFF2-40B4-BE49-F238E27FC236}">
+                <a16:creationId xmlns:a16="http://schemas.microsoft.com/office/drawing/2014/main" id="{855D78EA-8AAF-8B29-8ECE-3867B26ED4FE}"/>
+              </a:ext>
+            </a:extLst>
+          </p:cNvPr>
+          <p:cNvPicPr>
+            <a:picLocks noChangeAspect="1"/>
+          </p:cNvPicPr>
+          <p:nvPr/>
+        </p:nvPicPr>
+        <p:blipFill>
+          <a:blip r:embed="rId2"/>
+          <a:stretch>
+            <a:fillRect/>
+          </a:stretch>
+        </p:blipFill>
+        <p:spPr>
+          <a:xfrm>
+            <a:off x="498474" y="696418"/>
+            <a:ext cx="10350614" cy="5875832"/>
+          </a:xfrm>
+          <a:prstGeom prst="rect">
+            <a:avLst/>
+          </a:prstGeom>
+        </p:spPr>
+      </p:pic>
+      <p:sp>
+        <p:nvSpPr>
+          <p:cNvPr id="4" name="Textfeld 3">
+            <a:extLst>
+              <a:ext uri="{FF2B5EF4-FFF2-40B4-BE49-F238E27FC236}">
+                <a16:creationId xmlns:a16="http://schemas.microsoft.com/office/drawing/2014/main" id="{CBF5B1E1-ADE3-06F1-E023-D625B80DBFDD}"/>
+              </a:ext>
+            </a:extLst>
+          </p:cNvPr>
+          <p:cNvSpPr txBox="1"/>
+          <p:nvPr/>
+        </p:nvSpPr>
+        <p:spPr>
+          <a:xfrm>
+            <a:off x="371475" y="142875"/>
+            <a:ext cx="1843088" cy="369332"/>
+          </a:xfrm>
+          <a:prstGeom prst="rect">
+            <a:avLst/>
+          </a:prstGeom>
+          <a:noFill/>
+        </p:spPr>
+        <p:txBody>
+          <a:bodyPr wrap="square" rtlCol="0">
+            <a:spAutoFit/>
+          </a:bodyPr>
+          <a:lstStyle/>
+          <a:p>
+            <a:r>
+              <a:rPr lang="de-DE" dirty="0"/>
+              <a:t>PC 3 and PC 4</a:t>
+            </a:r>
+          </a:p>
+        </p:txBody>
+      </p:sp>
     </p:spTree>
     <p:extLst>
       <p:ext uri="{BB962C8B-B14F-4D97-AF65-F5344CB8AC3E}">
         <p14:creationId xmlns:p14="http://schemas.microsoft.com/office/powerpoint/2010/main" val="547071505"/>
+      </p:ext>
+    </p:extLst>
+  </p:cSld>
+  <p:clrMapOvr>
+    <a:masterClrMapping/>
+  </p:clrMapOvr>
+</p:sld>
+</file>
+
+<file path=ppt/slides/slide9.xml><?xml version="1.0" encoding="utf-8"?>
+<p:sld xmlns:a="http://schemas.openxmlformats.org/drawingml/2006/main" xmlns:r="http://schemas.openxmlformats.org/officeDocument/2006/relationships" xmlns:p="http://schemas.openxmlformats.org/presentationml/2006/main">
+  <p:cSld>
+    <p:spTree>
+      <p:nvGrpSpPr>
+        <p:cNvPr id="1" name=""/>
+        <p:cNvGrpSpPr/>
+        <p:nvPr/>
+      </p:nvGrpSpPr>
+      <p:grpSpPr>
+        <a:xfrm>
+          <a:off x="0" y="0"/>
+          <a:ext cx="0" cy="0"/>
+          <a:chOff x="0" y="0"/>
+          <a:chExt cx="0" cy="0"/>
+        </a:xfrm>
+      </p:grpSpPr>
+      <p:pic>
+        <p:nvPicPr>
+          <p:cNvPr id="3" name="Grafik 2">
+            <a:extLst>
+              <a:ext uri="{FF2B5EF4-FFF2-40B4-BE49-F238E27FC236}">
+                <a16:creationId xmlns:a16="http://schemas.microsoft.com/office/drawing/2014/main" id="{FFF4BEFF-8230-1E30-C63D-3676C619C5BA}"/>
+              </a:ext>
+            </a:extLst>
+          </p:cNvPr>
+          <p:cNvPicPr>
+            <a:picLocks noChangeAspect="1"/>
+          </p:cNvPicPr>
+          <p:nvPr/>
+        </p:nvPicPr>
+        <p:blipFill>
+          <a:blip r:embed="rId2"/>
+          <a:stretch>
+            <a:fillRect/>
+          </a:stretch>
+        </p:blipFill>
+        <p:spPr>
+          <a:xfrm>
+            <a:off x="1154633" y="781050"/>
+            <a:ext cx="9882733" cy="5610225"/>
+          </a:xfrm>
+          <a:prstGeom prst="rect">
+            <a:avLst/>
+          </a:prstGeom>
+        </p:spPr>
+      </p:pic>
+      <p:sp>
+        <p:nvSpPr>
+          <p:cNvPr id="4" name="Textfeld 3">
+            <a:extLst>
+              <a:ext uri="{FF2B5EF4-FFF2-40B4-BE49-F238E27FC236}">
+                <a16:creationId xmlns:a16="http://schemas.microsoft.com/office/drawing/2014/main" id="{54366AFF-0868-A621-9ACE-BABA82BFA380}"/>
+              </a:ext>
+            </a:extLst>
+          </p:cNvPr>
+          <p:cNvSpPr txBox="1"/>
+          <p:nvPr/>
+        </p:nvSpPr>
+        <p:spPr>
+          <a:xfrm>
+            <a:off x="371474" y="142875"/>
+            <a:ext cx="4029075" cy="369332"/>
+          </a:xfrm>
+          <a:prstGeom prst="rect">
+            <a:avLst/>
+          </a:prstGeom>
+          <a:noFill/>
+        </p:spPr>
+        <p:txBody>
+          <a:bodyPr wrap="square" rtlCol="0">
+            <a:spAutoFit/>
+          </a:bodyPr>
+          <a:lstStyle/>
+          <a:p>
+            <a:r>
+              <a:rPr lang="de-DE" dirty="0"/>
+              <a:t>PCA </a:t>
+            </a:r>
+            <a:r>
+              <a:rPr lang="de-DE" dirty="0" err="1"/>
+              <a:t>with</a:t>
+            </a:r>
+            <a:r>
+              <a:rPr lang="de-DE" dirty="0"/>
+              <a:t> </a:t>
+            </a:r>
+            <a:r>
+              <a:rPr lang="de-DE" dirty="0" err="1"/>
+              <a:t>aligned</a:t>
+            </a:r>
+            <a:r>
+              <a:rPr lang="de-DE" dirty="0"/>
+              <a:t> </a:t>
+            </a:r>
+            <a:r>
+              <a:rPr lang="de-DE" dirty="0" err="1"/>
+              <a:t>reads</a:t>
+            </a:r>
+            <a:r>
+              <a:rPr lang="de-DE" dirty="0"/>
+              <a:t> per sample</a:t>
+            </a:r>
+          </a:p>
+        </p:txBody>
+      </p:sp>
+    </p:spTree>
+    <p:extLst>
+      <p:ext uri="{BB962C8B-B14F-4D97-AF65-F5344CB8AC3E}">
+        <p14:creationId xmlns:p14="http://schemas.microsoft.com/office/powerpoint/2010/main" val="4041535115"/>
       </p:ext>
     </p:extLst>
   </p:cSld>

--- a/progress.pptx
+++ b/progress.pptx
@@ -207,7 +207,7 @@
           <a:p>
             <a:fld id="{391F0B43-6B19-1044-8D4F-E46BB78FCD8B}" type="datetimeFigureOut">
               <a:rPr lang="de-DE" smtClean="0"/>
-              <a:t>19.01.25</a:t>
+              <a:t>20.01.25</a:t>
             </a:fld>
             <a:endParaRPr lang="de-DE"/>
           </a:p>
@@ -890,7 +890,7 @@
           <a:p>
             <a:fld id="{B202D3EB-434C-7940-89BB-2B1A6C02241D}" type="datetimeFigureOut">
               <a:rPr lang="de-DE" smtClean="0"/>
-              <a:t>19.01.25</a:t>
+              <a:t>20.01.25</a:t>
             </a:fld>
             <a:endParaRPr lang="de-DE"/>
           </a:p>
@@ -1088,7 +1088,7 @@
           <a:p>
             <a:fld id="{B202D3EB-434C-7940-89BB-2B1A6C02241D}" type="datetimeFigureOut">
               <a:rPr lang="de-DE" smtClean="0"/>
-              <a:t>19.01.25</a:t>
+              <a:t>20.01.25</a:t>
             </a:fld>
             <a:endParaRPr lang="de-DE"/>
           </a:p>
@@ -1296,7 +1296,7 @@
           <a:p>
             <a:fld id="{B202D3EB-434C-7940-89BB-2B1A6C02241D}" type="datetimeFigureOut">
               <a:rPr lang="de-DE" smtClean="0"/>
-              <a:t>19.01.25</a:t>
+              <a:t>20.01.25</a:t>
             </a:fld>
             <a:endParaRPr lang="de-DE"/>
           </a:p>
@@ -1494,7 +1494,7 @@
           <a:p>
             <a:fld id="{B202D3EB-434C-7940-89BB-2B1A6C02241D}" type="datetimeFigureOut">
               <a:rPr lang="de-DE" smtClean="0"/>
-              <a:t>19.01.25</a:t>
+              <a:t>20.01.25</a:t>
             </a:fld>
             <a:endParaRPr lang="de-DE"/>
           </a:p>
@@ -1769,7 +1769,7 @@
           <a:p>
             <a:fld id="{B202D3EB-434C-7940-89BB-2B1A6C02241D}" type="datetimeFigureOut">
               <a:rPr lang="de-DE" smtClean="0"/>
-              <a:t>19.01.25</a:t>
+              <a:t>20.01.25</a:t>
             </a:fld>
             <a:endParaRPr lang="de-DE"/>
           </a:p>
@@ -2034,7 +2034,7 @@
           <a:p>
             <a:fld id="{B202D3EB-434C-7940-89BB-2B1A6C02241D}" type="datetimeFigureOut">
               <a:rPr lang="de-DE" smtClean="0"/>
-              <a:t>19.01.25</a:t>
+              <a:t>20.01.25</a:t>
             </a:fld>
             <a:endParaRPr lang="de-DE"/>
           </a:p>
@@ -2446,7 +2446,7 @@
           <a:p>
             <a:fld id="{B202D3EB-434C-7940-89BB-2B1A6C02241D}" type="datetimeFigureOut">
               <a:rPr lang="de-DE" smtClean="0"/>
-              <a:t>19.01.25</a:t>
+              <a:t>20.01.25</a:t>
             </a:fld>
             <a:endParaRPr lang="de-DE"/>
           </a:p>
@@ -2587,7 +2587,7 @@
           <a:p>
             <a:fld id="{B202D3EB-434C-7940-89BB-2B1A6C02241D}" type="datetimeFigureOut">
               <a:rPr lang="de-DE" smtClean="0"/>
-              <a:t>19.01.25</a:t>
+              <a:t>20.01.25</a:t>
             </a:fld>
             <a:endParaRPr lang="de-DE"/>
           </a:p>
@@ -2700,7 +2700,7 @@
           <a:p>
             <a:fld id="{B202D3EB-434C-7940-89BB-2B1A6C02241D}" type="datetimeFigureOut">
               <a:rPr lang="de-DE" smtClean="0"/>
-              <a:t>19.01.25</a:t>
+              <a:t>20.01.25</a:t>
             </a:fld>
             <a:endParaRPr lang="de-DE"/>
           </a:p>
@@ -3011,7 +3011,7 @@
           <a:p>
             <a:fld id="{B202D3EB-434C-7940-89BB-2B1A6C02241D}" type="datetimeFigureOut">
               <a:rPr lang="de-DE" smtClean="0"/>
-              <a:t>19.01.25</a:t>
+              <a:t>20.01.25</a:t>
             </a:fld>
             <a:endParaRPr lang="de-DE"/>
           </a:p>
@@ -3299,7 +3299,7 @@
           <a:p>
             <a:fld id="{B202D3EB-434C-7940-89BB-2B1A6C02241D}" type="datetimeFigureOut">
               <a:rPr lang="de-DE" smtClean="0"/>
-              <a:t>19.01.25</a:t>
+              <a:t>20.01.25</a:t>
             </a:fld>
             <a:endParaRPr lang="de-DE"/>
           </a:p>
@@ -3540,7 +3540,7 @@
           <a:p>
             <a:fld id="{B202D3EB-434C-7940-89BB-2B1A6C02241D}" type="datetimeFigureOut">
               <a:rPr lang="de-DE" smtClean="0"/>
-              <a:t>19.01.25</a:t>
+              <a:t>20.01.25</a:t>
             </a:fld>
             <a:endParaRPr lang="de-DE"/>
           </a:p>

--- a/progress.pptx
+++ b/progress.pptx
@@ -5,7 +5,7 @@
     <p:sldMasterId id="2147483648" r:id="rId1"/>
   </p:sldMasterIdLst>
   <p:notesMasterIdLst>
-    <p:notesMasterId r:id="rId13"/>
+    <p:notesMasterId r:id="rId14"/>
   </p:notesMasterIdLst>
   <p:sldIdLst>
     <p:sldId id="261" r:id="rId2"/>
@@ -15,10 +15,11 @@
     <p:sldId id="264" r:id="rId6"/>
     <p:sldId id="265" r:id="rId7"/>
     <p:sldId id="267" r:id="rId8"/>
-    <p:sldId id="268" r:id="rId9"/>
-    <p:sldId id="269" r:id="rId10"/>
-    <p:sldId id="270" r:id="rId11"/>
-    <p:sldId id="271" r:id="rId12"/>
+    <p:sldId id="272" r:id="rId9"/>
+    <p:sldId id="268" r:id="rId10"/>
+    <p:sldId id="269" r:id="rId11"/>
+    <p:sldId id="270" r:id="rId12"/>
+    <p:sldId id="271" r:id="rId13"/>
   </p:sldIdLst>
   <p:sldSz cx="12192000" cy="6858000"/>
   <p:notesSz cx="6858000" cy="9144000"/>
@@ -3984,16 +3985,8 @@
           <a:lstStyle/>
           <a:p>
             <a:r>
-              <a:rPr lang="de-DE" dirty="0" err="1"/>
-              <a:t>Current</a:t>
-            </a:r>
-            <a:r>
-              <a:rPr lang="de-DE" dirty="0"/>
-              <a:t> </a:t>
-            </a:r>
-            <a:r>
-              <a:rPr lang="de-DE" dirty="0" err="1"/>
-              <a:t>progress</a:t>
+              <a:rPr lang="de-DE"/>
+              <a:t>Progress</a:t>
             </a:r>
             <a:endParaRPr lang="de-DE" dirty="0"/>
           </a:p>
@@ -4869,32 +4862,13 @@
             </a:pPr>
             <a:r>
               <a:rPr lang="de-DE" dirty="0"/>
-              <a:t>VST and </a:t>
+              <a:t>VST, PCA and </a:t>
             </a:r>
             <a:r>
               <a:rPr lang="de-DE" dirty="0" err="1"/>
-              <a:t>DESeq</a:t>
-            </a:r>
-            <a:r>
-              <a:rPr lang="de-DE" dirty="0"/>
-              <a:t> (</a:t>
-            </a:r>
-            <a:r>
-              <a:rPr lang="de-DE" dirty="0" err="1"/>
-              <a:t>for</a:t>
-            </a:r>
-            <a:r>
-              <a:rPr lang="de-DE" dirty="0"/>
-              <a:t> </a:t>
-            </a:r>
-            <a:r>
-              <a:rPr lang="de-DE" dirty="0" err="1"/>
-              <a:t>normalization</a:t>
-            </a:r>
-            <a:r>
-              <a:rPr lang="de-DE" dirty="0"/>
-              <a:t>)</a:t>
-            </a:r>
+              <a:t>filtering</a:t>
+            </a:r>
+            <a:endParaRPr lang="de-DE" dirty="0"/>
           </a:p>
         </p:txBody>
       </p:sp>
@@ -4971,12 +4945,87 @@
           <a:chExt cx="0" cy="0"/>
         </a:xfrm>
       </p:grpSpPr>
+      <p:sp>
+        <p:nvSpPr>
+          <p:cNvPr id="4" name="Textfeld 3">
+            <a:extLst>
+              <a:ext uri="{FF2B5EF4-FFF2-40B4-BE49-F238E27FC236}">
+                <a16:creationId xmlns:a16="http://schemas.microsoft.com/office/drawing/2014/main" id="{54366AFF-0868-A621-9ACE-BABA82BFA380}"/>
+              </a:ext>
+            </a:extLst>
+          </p:cNvPr>
+          <p:cNvSpPr txBox="1"/>
+          <p:nvPr/>
+        </p:nvSpPr>
+        <p:spPr>
+          <a:xfrm>
+            <a:off x="371474" y="142875"/>
+            <a:ext cx="4029075" cy="646331"/>
+          </a:xfrm>
+          <a:prstGeom prst="rect">
+            <a:avLst/>
+          </a:prstGeom>
+          <a:noFill/>
+        </p:spPr>
+        <p:txBody>
+          <a:bodyPr wrap="square" rtlCol="0">
+            <a:spAutoFit/>
+          </a:bodyPr>
+          <a:lstStyle/>
+          <a:p>
+            <a:r>
+              <a:rPr lang="de-DE" dirty="0"/>
+              <a:t>PCA </a:t>
+            </a:r>
+            <a:r>
+              <a:rPr lang="de-DE" dirty="0" err="1"/>
+              <a:t>with</a:t>
+            </a:r>
+            <a:r>
+              <a:rPr lang="de-DE" dirty="0"/>
+              <a:t> </a:t>
+            </a:r>
+            <a:r>
+              <a:rPr lang="de-DE" dirty="0" err="1"/>
+              <a:t>number</a:t>
+            </a:r>
+            <a:r>
+              <a:rPr lang="de-DE" dirty="0"/>
+              <a:t> </a:t>
+            </a:r>
+            <a:r>
+              <a:rPr lang="de-DE" dirty="0" err="1"/>
+              <a:t>of</a:t>
+            </a:r>
+            <a:r>
+              <a:rPr lang="de-DE" dirty="0"/>
+              <a:t> </a:t>
+            </a:r>
+            <a:r>
+              <a:rPr lang="de-DE" dirty="0" err="1"/>
+              <a:t>aligned</a:t>
+            </a:r>
+            <a:r>
+              <a:rPr lang="de-DE" dirty="0"/>
+              <a:t> </a:t>
+            </a:r>
+            <a:r>
+              <a:rPr lang="de-DE" dirty="0" err="1"/>
+              <a:t>reads</a:t>
+            </a:r>
+            <a:r>
+              <a:rPr lang="de-DE" dirty="0"/>
+              <a:t> per sample</a:t>
+            </a:r>
+          </a:p>
+        </p:txBody>
+      </p:sp>
       <p:pic>
         <p:nvPicPr>
-          <p:cNvPr id="3" name="Grafik 2">
-            <a:extLst>
-              <a:ext uri="{FF2B5EF4-FFF2-40B4-BE49-F238E27FC236}">
-                <a16:creationId xmlns:a16="http://schemas.microsoft.com/office/drawing/2014/main" id="{B074F2C8-1AD1-4F4F-E716-0D32A560C935}"/>
+          <p:cNvPr id="5" name="Grafik 4">
+            <a:extLst>
+              <a:ext uri="{FF2B5EF4-FFF2-40B4-BE49-F238E27FC236}">
+                <a16:creationId xmlns:a16="http://schemas.microsoft.com/office/drawing/2014/main" id="{C270D5FE-6E3A-47BB-3898-64023D8AD9F7}"/>
               </a:ext>
             </a:extLst>
           </p:cNvPr>
@@ -4993,8 +5042,8 @@
         </p:blipFill>
         <p:spPr>
           <a:xfrm>
-            <a:off x="1098549" y="723624"/>
-            <a:ext cx="9531351" cy="5410752"/>
+            <a:off x="1374774" y="778950"/>
+            <a:ext cx="8952958" cy="5650425"/>
           </a:xfrm>
           <a:prstGeom prst="rect">
             <a:avLst/>
@@ -5004,7 +5053,7 @@
     </p:spTree>
     <p:extLst>
       <p:ext uri="{BB962C8B-B14F-4D97-AF65-F5344CB8AC3E}">
-        <p14:creationId xmlns:p14="http://schemas.microsoft.com/office/powerpoint/2010/main" val="2990666644"/>
+        <p14:creationId xmlns:p14="http://schemas.microsoft.com/office/powerpoint/2010/main" val="4041535115"/>
       </p:ext>
     </p:extLst>
   </p:cSld>
@@ -5033,10 +5082,10 @@
       </p:grpSpPr>
       <p:pic>
         <p:nvPicPr>
-          <p:cNvPr id="3" name="Grafik 2">
-            <a:extLst>
-              <a:ext uri="{FF2B5EF4-FFF2-40B4-BE49-F238E27FC236}">
-                <a16:creationId xmlns:a16="http://schemas.microsoft.com/office/drawing/2014/main" id="{DD35B781-7B6D-C28C-3991-30F98B3539DB}"/>
+          <p:cNvPr id="6" name="Grafik 5">
+            <a:extLst>
+              <a:ext uri="{FF2B5EF4-FFF2-40B4-BE49-F238E27FC236}">
+                <a16:creationId xmlns:a16="http://schemas.microsoft.com/office/drawing/2014/main" id="{A7437989-47D2-57A5-EC89-6C2A24076306}"/>
               </a:ext>
             </a:extLst>
           </p:cNvPr>
@@ -5053,8 +5102,68 @@
         </p:blipFill>
         <p:spPr>
           <a:xfrm>
-            <a:off x="0" y="1638299"/>
-            <a:ext cx="6308842" cy="3581400"/>
+            <a:off x="1117600" y="449823"/>
+            <a:ext cx="9440862" cy="5958353"/>
+          </a:xfrm>
+          <a:prstGeom prst="rect">
+            <a:avLst/>
+          </a:prstGeom>
+        </p:spPr>
+      </p:pic>
+    </p:spTree>
+    <p:extLst>
+      <p:ext uri="{BB962C8B-B14F-4D97-AF65-F5344CB8AC3E}">
+        <p14:creationId xmlns:p14="http://schemas.microsoft.com/office/powerpoint/2010/main" val="2990666644"/>
+      </p:ext>
+    </p:extLst>
+  </p:cSld>
+  <p:clrMapOvr>
+    <a:masterClrMapping/>
+  </p:clrMapOvr>
+</p:sld>
+</file>
+
+<file path=ppt/slides/slide12.xml><?xml version="1.0" encoding="utf-8"?>
+<p:sld xmlns:a="http://schemas.openxmlformats.org/drawingml/2006/main" xmlns:r="http://schemas.openxmlformats.org/officeDocument/2006/relationships" xmlns:p="http://schemas.openxmlformats.org/presentationml/2006/main">
+  <p:cSld>
+    <p:spTree>
+      <p:nvGrpSpPr>
+        <p:cNvPr id="1" name=""/>
+        <p:cNvGrpSpPr/>
+        <p:nvPr/>
+      </p:nvGrpSpPr>
+      <p:grpSpPr>
+        <a:xfrm>
+          <a:off x="0" y="0"/>
+          <a:ext cx="0" cy="0"/>
+          <a:chOff x="0" y="0"/>
+          <a:chExt cx="0" cy="0"/>
+        </a:xfrm>
+      </p:grpSpPr>
+      <p:pic>
+        <p:nvPicPr>
+          <p:cNvPr id="3" name="Grafik 2">
+            <a:extLst>
+              <a:ext uri="{FF2B5EF4-FFF2-40B4-BE49-F238E27FC236}">
+                <a16:creationId xmlns:a16="http://schemas.microsoft.com/office/drawing/2014/main" id="{DD35B781-7B6D-C28C-3991-30F98B3539DB}"/>
+              </a:ext>
+            </a:extLst>
+          </p:cNvPr>
+          <p:cNvPicPr>
+            <a:picLocks noChangeAspect="1"/>
+          </p:cNvPicPr>
+          <p:nvPr/>
+        </p:nvPicPr>
+        <p:blipFill>
+          <a:blip r:embed="rId2"/>
+          <a:stretch>
+            <a:fillRect/>
+          </a:stretch>
+        </p:blipFill>
+        <p:spPr>
+          <a:xfrm>
+            <a:off x="314325" y="89251"/>
+            <a:ext cx="5883159" cy="3339749"/>
           </a:xfrm>
           <a:prstGeom prst="rect">
             <a:avLst/>
@@ -5083,8 +5192,68 @@
         </p:blipFill>
         <p:spPr>
           <a:xfrm>
-            <a:off x="6308842" y="1803759"/>
+            <a:off x="6323130" y="0"/>
             <a:ext cx="5725906" cy="3250479"/>
+          </a:xfrm>
+          <a:prstGeom prst="rect">
+            <a:avLst/>
+          </a:prstGeom>
+        </p:spPr>
+      </p:pic>
+      <p:pic>
+        <p:nvPicPr>
+          <p:cNvPr id="4" name="Grafik 3">
+            <a:extLst>
+              <a:ext uri="{FF2B5EF4-FFF2-40B4-BE49-F238E27FC236}">
+                <a16:creationId xmlns:a16="http://schemas.microsoft.com/office/drawing/2014/main" id="{EAC0CDB0-B6D9-32D9-9A35-5C932F54E08A}"/>
+              </a:ext>
+            </a:extLst>
+          </p:cNvPr>
+          <p:cNvPicPr>
+            <a:picLocks noChangeAspect="1"/>
+          </p:cNvPicPr>
+          <p:nvPr/>
+        </p:nvPicPr>
+        <p:blipFill>
+          <a:blip r:embed="rId4"/>
+          <a:stretch>
+            <a:fillRect/>
+          </a:stretch>
+        </p:blipFill>
+        <p:spPr>
+          <a:xfrm>
+            <a:off x="592364" y="3605221"/>
+            <a:ext cx="5012531" cy="3163528"/>
+          </a:xfrm>
+          <a:prstGeom prst="rect">
+            <a:avLst/>
+          </a:prstGeom>
+        </p:spPr>
+      </p:pic>
+      <p:pic>
+        <p:nvPicPr>
+          <p:cNvPr id="7" name="Grafik 6">
+            <a:extLst>
+              <a:ext uri="{FF2B5EF4-FFF2-40B4-BE49-F238E27FC236}">
+                <a16:creationId xmlns:a16="http://schemas.microsoft.com/office/drawing/2014/main" id="{604B7559-87AF-601A-0995-675FD88DDB06}"/>
+              </a:ext>
+            </a:extLst>
+          </p:cNvPr>
+          <p:cNvPicPr>
+            <a:picLocks noChangeAspect="1"/>
+          </p:cNvPicPr>
+          <p:nvPr/>
+        </p:nvPicPr>
+        <p:blipFill>
+          <a:blip r:embed="rId5"/>
+          <a:stretch>
+            <a:fillRect/>
+          </a:stretch>
+        </p:blipFill>
+        <p:spPr>
+          <a:xfrm>
+            <a:off x="6473111" y="3429000"/>
+            <a:ext cx="5126525" cy="3235472"/>
           </a:xfrm>
           <a:prstGeom prst="rect">
             <a:avLst/>
@@ -5785,50 +5954,6 @@
           </a:p>
         </p:txBody>
       </p:sp>
-      <p:sp>
-        <p:nvSpPr>
-          <p:cNvPr id="6" name="Textfeld 5">
-            <a:extLst>
-              <a:ext uri="{FF2B5EF4-FFF2-40B4-BE49-F238E27FC236}">
-                <a16:creationId xmlns:a16="http://schemas.microsoft.com/office/drawing/2014/main" id="{44F5E852-C5A2-237C-84E2-DBCFEDF55B71}"/>
-              </a:ext>
-            </a:extLst>
-          </p:cNvPr>
-          <p:cNvSpPr txBox="1"/>
-          <p:nvPr/>
-        </p:nvSpPr>
-        <p:spPr>
-          <a:xfrm>
-            <a:off x="5260428" y="5846544"/>
-            <a:ext cx="6093372" cy="646331"/>
-          </a:xfrm>
-          <a:prstGeom prst="rect">
-            <a:avLst/>
-          </a:prstGeom>
-          <a:noFill/>
-        </p:spPr>
-        <p:txBody>
-          <a:bodyPr wrap="square">
-            <a:spAutoFit/>
-          </a:bodyPr>
-          <a:lstStyle/>
-          <a:p>
-            <a:pPr marL="0" indent="0">
-              <a:buNone/>
-            </a:pPr>
-            <a:r>
-              <a:rPr lang="de-DE" sz="1800" dirty="0">
-                <a:hlinkClick r:id="rId3"/>
-              </a:rPr>
-              <a:t>https://gitlab.lrz.de/00000000014B0D03/bachelor-thesis-luisa/-/tree/main/data</a:t>
-            </a:r>
-            <a:r>
-              <a:rPr lang="de-DE" sz="1800" dirty="0"/>
-              <a:t> </a:t>
-            </a:r>
-          </a:p>
-        </p:txBody>
-      </p:sp>
     </p:spTree>
     <p:extLst>
       <p:ext uri="{BB962C8B-B14F-4D97-AF65-F5344CB8AC3E}">
@@ -6627,8 +6752,8 @@
         </p:nvSpPr>
         <p:spPr>
           <a:xfrm>
-            <a:off x="125506" y="502024"/>
-            <a:ext cx="2205317" cy="2308324"/>
+            <a:off x="79209" y="339979"/>
+            <a:ext cx="11576497" cy="1323439"/>
           </a:xfrm>
           <a:prstGeom prst="rect">
             <a:avLst/>
@@ -6670,7 +6795,7 @@
             </a:pPr>
             <a:r>
               <a:rPr lang="de-DE" sz="1600" dirty="0" err="1"/>
-              <a:t>Created</a:t>
+              <a:t>Extracted</a:t>
             </a:r>
             <a:r>
               <a:rPr lang="de-DE" sz="1600" dirty="0"/>
@@ -6678,9 +6803,28 @@
             </a:r>
             <a:r>
               <a:rPr lang="de-DE" sz="1600" dirty="0" err="1"/>
-              <a:t>DESeqDataset</a:t>
-            </a:r>
-            <a:endParaRPr lang="de-DE" sz="1600" dirty="0"/>
+              <a:t>est_counts</a:t>
+            </a:r>
+            <a:r>
+              <a:rPr lang="de-DE" sz="1600" dirty="0"/>
+              <a:t> and </a:t>
+            </a:r>
+            <a:r>
+              <a:rPr lang="de-DE" sz="1600" dirty="0" err="1"/>
+              <a:t>tpm</a:t>
+            </a:r>
+            <a:r>
+              <a:rPr lang="de-DE" sz="1600" dirty="0"/>
+              <a:t> </a:t>
+            </a:r>
+            <a:r>
+              <a:rPr lang="de-DE" sz="1600" dirty="0" err="1"/>
+              <a:t>values</a:t>
+            </a:r>
+            <a:r>
+              <a:rPr lang="de-DE" sz="1600" dirty="0"/>
+              <a:t> </a:t>
+            </a:r>
           </a:p>
           <a:p>
             <a:pPr marL="285750" indent="-285750">
@@ -6688,8 +6832,132 @@
               <a:buChar char="•"/>
             </a:pPr>
             <a:r>
+              <a:rPr lang="de-DE" sz="1600" dirty="0" err="1"/>
+              <a:t>scaled</a:t>
+            </a:r>
+            <a:r>
               <a:rPr lang="de-DE" sz="1600" dirty="0"/>
-              <a:t>VST (blind =FALSE)</a:t>
+              <a:t> </a:t>
+            </a:r>
+            <a:r>
+              <a:rPr lang="de-DE" sz="1600" dirty="0" err="1"/>
+              <a:t>counts</a:t>
+            </a:r>
+            <a:r>
+              <a:rPr lang="de-DE" sz="1600" dirty="0"/>
+              <a:t> </a:t>
+            </a:r>
+            <a:r>
+              <a:rPr lang="de-DE" sz="1600" dirty="0" err="1"/>
+              <a:t>with</a:t>
+            </a:r>
+            <a:r>
+              <a:rPr lang="de-DE" sz="1600" dirty="0"/>
+              <a:t> </a:t>
+            </a:r>
+            <a:r>
+              <a:rPr lang="de-DE" sz="1600" i="1" dirty="0" err="1"/>
+              <a:t>lengthScaledTPM</a:t>
+            </a:r>
+            <a:r>
+              <a:rPr lang="de-DE" sz="1600" dirty="0"/>
+              <a:t> (</a:t>
+            </a:r>
+            <a:r>
+              <a:rPr lang="de-DE" sz="1600" dirty="0" err="1"/>
+              <a:t>scaled</a:t>
+            </a:r>
+            <a:r>
+              <a:rPr lang="de-DE" sz="1600" dirty="0"/>
+              <a:t> </a:t>
+            </a:r>
+            <a:r>
+              <a:rPr lang="de-DE" sz="1600" dirty="0" err="1"/>
+              <a:t>using</a:t>
+            </a:r>
+            <a:r>
+              <a:rPr lang="de-DE" sz="1600" dirty="0"/>
+              <a:t> </a:t>
+            </a:r>
+            <a:r>
+              <a:rPr lang="de-DE" sz="1600" dirty="0" err="1"/>
+              <a:t>the</a:t>
+            </a:r>
+            <a:r>
+              <a:rPr lang="de-DE" sz="1600" dirty="0"/>
+              <a:t> </a:t>
+            </a:r>
+            <a:r>
+              <a:rPr lang="de-DE" sz="1600" dirty="0" err="1"/>
+              <a:t>average</a:t>
+            </a:r>
+            <a:r>
+              <a:rPr lang="de-DE" sz="1600" dirty="0"/>
+              <a:t> </a:t>
+            </a:r>
+            <a:r>
+              <a:rPr lang="de-DE" sz="1600" dirty="0" err="1"/>
+              <a:t>transcript</a:t>
+            </a:r>
+            <a:r>
+              <a:rPr lang="de-DE" sz="1600" dirty="0"/>
+              <a:t> </a:t>
+            </a:r>
+            <a:r>
+              <a:rPr lang="de-DE" sz="1600" dirty="0" err="1"/>
+              <a:t>length</a:t>
+            </a:r>
+            <a:r>
+              <a:rPr lang="de-DE" sz="1600" dirty="0"/>
+              <a:t>, </a:t>
+            </a:r>
+            <a:r>
+              <a:rPr lang="de-DE" sz="1600" dirty="0" err="1"/>
+              <a:t>averaged</a:t>
+            </a:r>
+            <a:r>
+              <a:rPr lang="de-DE" sz="1600" dirty="0"/>
+              <a:t> </a:t>
+            </a:r>
+            <a:r>
+              <a:rPr lang="de-DE" sz="1600" dirty="0" err="1"/>
+              <a:t>over</a:t>
+            </a:r>
+            <a:r>
+              <a:rPr lang="de-DE" sz="1600" dirty="0"/>
+              <a:t> </a:t>
+            </a:r>
+            <a:r>
+              <a:rPr lang="de-DE" sz="1600" dirty="0" err="1"/>
+              <a:t>samples</a:t>
+            </a:r>
+            <a:r>
+              <a:rPr lang="de-DE" sz="1600" dirty="0"/>
+              <a:t> and </a:t>
+            </a:r>
+            <a:r>
+              <a:rPr lang="de-DE" sz="1600" dirty="0" err="1"/>
+              <a:t>to</a:t>
+            </a:r>
+            <a:r>
+              <a:rPr lang="de-DE" sz="1600" dirty="0"/>
+              <a:t> </a:t>
+            </a:r>
+            <a:r>
+              <a:rPr lang="de-DE" sz="1600" dirty="0" err="1"/>
+              <a:t>library</a:t>
+            </a:r>
+            <a:r>
+              <a:rPr lang="de-DE" sz="1600" dirty="0"/>
+              <a:t> </a:t>
+            </a:r>
+            <a:r>
+              <a:rPr lang="de-DE" sz="1600" dirty="0" err="1"/>
+              <a:t>size</a:t>
+            </a:r>
+            <a:r>
+              <a:rPr lang="de-DE" sz="1600" dirty="0"/>
+              <a:t>)</a:t>
             </a:r>
           </a:p>
           <a:p>
@@ -6698,12 +6966,8 @@
               <a:buChar char="•"/>
             </a:pPr>
             <a:r>
-              <a:rPr lang="de-DE" sz="1600" dirty="0"/>
-              <a:t>Filter genes </a:t>
-            </a:r>
-            <a:r>
               <a:rPr lang="de-DE" sz="1600" dirty="0" err="1"/>
-              <a:t>with</a:t>
+              <a:t>Created</a:t>
             </a:r>
             <a:r>
               <a:rPr lang="de-DE" sz="1600" dirty="0"/>
@@ -6711,27 +6975,19 @@
             </a:r>
             <a:r>
               <a:rPr lang="de-DE" sz="1600" dirty="0" err="1"/>
-              <a:t>tpm</a:t>
+              <a:t>DESeqDataset</a:t>
             </a:r>
             <a:r>
               <a:rPr lang="de-DE" sz="1600" dirty="0"/>
-              <a:t>? (like in </a:t>
+              <a:t> (design ~ Experiment + </a:t>
             </a:r>
             <a:r>
               <a:rPr lang="de-DE" sz="1600" dirty="0" err="1"/>
-              <a:t>the</a:t>
+              <a:t>infected.control</a:t>
             </a:r>
             <a:r>
               <a:rPr lang="de-DE" sz="1600" dirty="0"/>
-              <a:t> </a:t>
-            </a:r>
-            <a:r>
-              <a:rPr lang="de-DE" sz="1600" dirty="0" err="1"/>
-              <a:t>internship</a:t>
-            </a:r>
-            <a:r>
-              <a:rPr lang="de-DE" sz="1600" dirty="0"/>
-              <a:t>?)</a:t>
+              <a:t>)</a:t>
             </a:r>
           </a:p>
           <a:p>
@@ -6739,6 +6995,46 @@
               <a:buFont typeface="Arial" panose="020B0604020202020204" pitchFamily="34" charset="0"/>
               <a:buChar char="•"/>
             </a:pPr>
+            <a:r>
+              <a:rPr lang="de-DE" sz="1600" dirty="0"/>
+              <a:t>VST (</a:t>
+            </a:r>
+            <a:r>
+              <a:rPr lang="de-DE" sz="1600" dirty="0" err="1"/>
+              <a:t>with</a:t>
+            </a:r>
+            <a:r>
+              <a:rPr lang="de-DE" sz="1600" dirty="0"/>
+              <a:t> blind </a:t>
+            </a:r>
+            <a:r>
+              <a:rPr lang="de-DE" sz="1600" dirty="0" err="1"/>
+              <a:t>dispersion</a:t>
+            </a:r>
+            <a:r>
+              <a:rPr lang="de-DE" sz="1600" dirty="0"/>
+              <a:t> </a:t>
+            </a:r>
+            <a:r>
+              <a:rPr lang="de-DE" sz="1600" dirty="0" err="1"/>
+              <a:t>estimation</a:t>
+            </a:r>
+            <a:r>
+              <a:rPr lang="de-DE" sz="1600" dirty="0"/>
+              <a:t>) on </a:t>
+            </a:r>
+            <a:r>
+              <a:rPr lang="de-DE" sz="1600" dirty="0" err="1"/>
+              <a:t>the</a:t>
+            </a:r>
+            <a:r>
+              <a:rPr lang="de-DE" sz="1600" dirty="0"/>
+              <a:t> </a:t>
+            </a:r>
+            <a:r>
+              <a:rPr lang="de-DE" sz="1600" dirty="0" err="1"/>
+              <a:t>estimated_counts</a:t>
+            </a:r>
             <a:endParaRPr lang="de-DE" sz="1600" dirty="0"/>
           </a:p>
         </p:txBody>
@@ -6757,8 +7053,8 @@
         </p:nvSpPr>
         <p:spPr>
           <a:xfrm>
-            <a:off x="281353" y="4167554"/>
-            <a:ext cx="2377856" cy="2308324"/>
+            <a:off x="8697293" y="2897395"/>
+            <a:ext cx="3494707" cy="1815882"/>
           </a:xfrm>
           <a:prstGeom prst="rect">
             <a:avLst/>
@@ -6771,9 +7067,28 @@
           </a:bodyPr>
           <a:lstStyle/>
           <a:p>
+            <a:pPr marL="285750" indent="-285750">
+              <a:buFont typeface="Arial" panose="020B0604020202020204" pitchFamily="34" charset="0"/>
+              <a:buChar char="•"/>
+            </a:pPr>
+            <a:r>
+              <a:rPr lang="de-DE" sz="1600" dirty="0"/>
+              <a:t>not </a:t>
+            </a:r>
             <a:r>
               <a:rPr lang="de-DE" sz="1600" dirty="0" err="1"/>
-              <a:t>Outlier</a:t>
+              <a:t>filtered</a:t>
+            </a:r>
+            <a:endParaRPr lang="de-DE" sz="1600" dirty="0"/>
+          </a:p>
+          <a:p>
+            <a:pPr marL="285750" indent="-285750">
+              <a:buFont typeface="Arial" panose="020B0604020202020204" pitchFamily="34" charset="0"/>
+              <a:buChar char="•"/>
+            </a:pPr>
+            <a:r>
+              <a:rPr lang="de-DE" sz="1600" dirty="0" err="1"/>
+              <a:t>outlier</a:t>
             </a:r>
             <a:r>
               <a:rPr lang="de-DE" sz="1600" dirty="0"/>
@@ -6904,8 +7219,8 @@
         </p:blipFill>
         <p:spPr>
           <a:xfrm>
-            <a:off x="2330822" y="598370"/>
-            <a:ext cx="9744593" cy="5757605"/>
+            <a:off x="446737" y="1816753"/>
+            <a:ext cx="7533891" cy="4451409"/>
           </a:xfrm>
           <a:prstGeom prst="rect">
             <a:avLst/>
@@ -7043,7 +7358,7 @@
           <p:cNvPr id="3" name="Grafik 2">
             <a:extLst>
               <a:ext uri="{FF2B5EF4-FFF2-40B4-BE49-F238E27FC236}">
-                <a16:creationId xmlns:a16="http://schemas.microsoft.com/office/drawing/2014/main" id="{855D78EA-8AAF-8B29-8ECE-3867B26ED4FE}"/>
+                <a16:creationId xmlns:a16="http://schemas.microsoft.com/office/drawing/2014/main" id="{589ED586-DA99-0573-B73F-1131F741D250}"/>
               </a:ext>
             </a:extLst>
           </p:cNvPr>
@@ -7060,8 +7375,8 @@
         </p:blipFill>
         <p:spPr>
           <a:xfrm>
-            <a:off x="498474" y="696418"/>
-            <a:ext cx="10350614" cy="5875832"/>
+            <a:off x="260351" y="418263"/>
+            <a:ext cx="9540875" cy="6021474"/>
           </a:xfrm>
           <a:prstGeom prst="rect">
             <a:avLst/>
@@ -7073,7 +7388,7 @@
           <p:cNvPr id="4" name="Textfeld 3">
             <a:extLst>
               <a:ext uri="{FF2B5EF4-FFF2-40B4-BE49-F238E27FC236}">
-                <a16:creationId xmlns:a16="http://schemas.microsoft.com/office/drawing/2014/main" id="{CBF5B1E1-ADE3-06F1-E023-D625B80DBFDD}"/>
+                <a16:creationId xmlns:a16="http://schemas.microsoft.com/office/drawing/2014/main" id="{F85A0C58-7156-A820-9AA0-491831E82699}"/>
               </a:ext>
             </a:extLst>
           </p:cNvPr>
@@ -7082,8 +7397,8 @@
         </p:nvSpPr>
         <p:spPr>
           <a:xfrm>
-            <a:off x="371475" y="142875"/>
-            <a:ext cx="1843088" cy="369332"/>
+            <a:off x="10003962" y="209919"/>
+            <a:ext cx="2080007" cy="2893100"/>
           </a:xfrm>
           <a:prstGeom prst="rect">
             <a:avLst/>
@@ -7097,16 +7412,164 @@
           <a:lstStyle/>
           <a:p>
             <a:r>
-              <a:rPr lang="de-DE" dirty="0"/>
-              <a:t>PC 3 and PC 4</a:t>
-            </a:r>
+              <a:rPr lang="de-DE" sz="1400" dirty="0"/>
+              <a:t>After </a:t>
+            </a:r>
+            <a:r>
+              <a:rPr lang="de-DE" sz="1400" dirty="0" err="1"/>
+              <a:t>filtering</a:t>
+            </a:r>
+            <a:r>
+              <a:rPr lang="de-DE" sz="1400" dirty="0"/>
+              <a:t> </a:t>
+            </a:r>
+            <a:r>
+              <a:rPr lang="de-DE" sz="1400" dirty="0" err="1"/>
+              <a:t>low</a:t>
+            </a:r>
+            <a:r>
+              <a:rPr lang="de-DE" sz="1400" dirty="0"/>
+              <a:t> </a:t>
+            </a:r>
+            <a:r>
+              <a:rPr lang="de-DE" sz="1400" dirty="0" err="1"/>
+              <a:t>expressed</a:t>
+            </a:r>
+            <a:r>
+              <a:rPr lang="de-DE" sz="1400" dirty="0"/>
+              <a:t> genes:</a:t>
+            </a:r>
+          </a:p>
+          <a:p>
+            <a:r>
+              <a:rPr lang="de-DE" sz="1400" dirty="0" err="1"/>
+              <a:t>Result</a:t>
+            </a:r>
+            <a:r>
+              <a:rPr lang="de-DE" sz="1400" dirty="0"/>
+              <a:t>: </a:t>
+            </a:r>
+          </a:p>
+          <a:p>
+            <a:r>
+              <a:rPr lang="de-DE" sz="1400" dirty="0"/>
+              <a:t>- </a:t>
+            </a:r>
+            <a:r>
+              <a:rPr lang="de-DE" sz="1400" dirty="0" err="1"/>
+              <a:t>before</a:t>
+            </a:r>
+            <a:r>
+              <a:rPr lang="de-DE" sz="1400" dirty="0"/>
+              <a:t> </a:t>
+            </a:r>
+            <a:r>
+              <a:rPr lang="de-DE" sz="1400" dirty="0" err="1"/>
+              <a:t>filtering</a:t>
+            </a:r>
+            <a:r>
+              <a:rPr lang="de-DE" sz="1400" dirty="0"/>
+              <a:t>: 27321 genes</a:t>
+            </a:r>
+          </a:p>
+          <a:p>
+            <a:r>
+              <a:rPr lang="de-DE" sz="1400" dirty="0"/>
+              <a:t>- after </a:t>
+            </a:r>
+            <a:r>
+              <a:rPr lang="de-DE" sz="1400" dirty="0" err="1"/>
+              <a:t>filtering</a:t>
+            </a:r>
+            <a:r>
+              <a:rPr lang="de-DE" sz="1400" dirty="0"/>
+              <a:t>: 19017 genes</a:t>
+            </a:r>
+          </a:p>
+          <a:p>
+            <a:endParaRPr lang="de-DE" sz="1400" dirty="0"/>
+          </a:p>
+          <a:p>
+            <a:r>
+              <a:rPr lang="de-DE" sz="1400" dirty="0"/>
+              <a:t>--&gt; </a:t>
+            </a:r>
+            <a:r>
+              <a:rPr lang="de-DE" sz="1400" dirty="0" err="1"/>
+              <a:t>keep</a:t>
+            </a:r>
+            <a:r>
+              <a:rPr lang="de-DE" sz="1400" dirty="0"/>
+              <a:t> genes </a:t>
+            </a:r>
+            <a:r>
+              <a:rPr lang="de-DE" sz="1400" dirty="0" err="1"/>
+              <a:t>that</a:t>
+            </a:r>
+            <a:r>
+              <a:rPr lang="de-DE" sz="1400" dirty="0"/>
+              <a:t> </a:t>
+            </a:r>
+            <a:r>
+              <a:rPr lang="de-DE" sz="1400" dirty="0" err="1"/>
+              <a:t>have</a:t>
+            </a:r>
+            <a:r>
+              <a:rPr lang="de-DE" sz="1400" dirty="0"/>
+              <a:t> at least a </a:t>
+            </a:r>
+            <a:r>
+              <a:rPr lang="de-DE" sz="1400" dirty="0" err="1"/>
+              <a:t>tpm</a:t>
+            </a:r>
+            <a:r>
+              <a:rPr lang="de-DE" sz="1400" dirty="0"/>
+              <a:t> </a:t>
+            </a:r>
+            <a:r>
+              <a:rPr lang="de-DE" sz="1400" dirty="0" err="1"/>
+              <a:t>value</a:t>
+            </a:r>
+            <a:r>
+              <a:rPr lang="de-DE" sz="1400" dirty="0"/>
+              <a:t> </a:t>
+            </a:r>
+            <a:r>
+              <a:rPr lang="de-DE" sz="1400" dirty="0" err="1"/>
+              <a:t>of</a:t>
+            </a:r>
+            <a:r>
+              <a:rPr lang="de-DE" sz="1400" dirty="0"/>
+              <a:t> 0.5 per sample in at least 51% </a:t>
+            </a:r>
+            <a:r>
+              <a:rPr lang="de-DE" sz="1400" dirty="0" err="1"/>
+              <a:t>of</a:t>
+            </a:r>
+            <a:r>
+              <a:rPr lang="de-DE" sz="1400" dirty="0"/>
+              <a:t> </a:t>
+            </a:r>
+            <a:r>
+              <a:rPr lang="de-DE" sz="1400" dirty="0" err="1"/>
+              <a:t>the</a:t>
+            </a:r>
+            <a:r>
+              <a:rPr lang="de-DE" sz="1400" dirty="0"/>
+              <a:t> </a:t>
+            </a:r>
+            <a:r>
+              <a:rPr lang="de-DE" sz="1400" dirty="0" err="1"/>
+              <a:t>samples</a:t>
+            </a:r>
+            <a:endParaRPr lang="de-DE" sz="1400" dirty="0"/>
           </a:p>
         </p:txBody>
       </p:sp>
     </p:spTree>
     <p:extLst>
       <p:ext uri="{BB962C8B-B14F-4D97-AF65-F5344CB8AC3E}">
-        <p14:creationId xmlns:p14="http://schemas.microsoft.com/office/powerpoint/2010/main" val="547071505"/>
+        <p14:creationId xmlns:p14="http://schemas.microsoft.com/office/powerpoint/2010/main" val="639192032"/>
       </p:ext>
     </p:extLst>
   </p:cSld>
@@ -7138,7 +7601,7 @@
           <p:cNvPr id="3" name="Grafik 2">
             <a:extLst>
               <a:ext uri="{FF2B5EF4-FFF2-40B4-BE49-F238E27FC236}">
-                <a16:creationId xmlns:a16="http://schemas.microsoft.com/office/drawing/2014/main" id="{FFF4BEFF-8230-1E30-C63D-3676C619C5BA}"/>
+                <a16:creationId xmlns:a16="http://schemas.microsoft.com/office/drawing/2014/main" id="{855D78EA-8AAF-8B29-8ECE-3867B26ED4FE}"/>
               </a:ext>
             </a:extLst>
           </p:cNvPr>
@@ -7155,8 +7618,8 @@
         </p:blipFill>
         <p:spPr>
           <a:xfrm>
-            <a:off x="1154633" y="781050"/>
-            <a:ext cx="9882733" cy="5610225"/>
+            <a:off x="89511" y="1607506"/>
+            <a:ext cx="6077847" cy="3450269"/>
           </a:xfrm>
           <a:prstGeom prst="rect">
             <a:avLst/>
@@ -7168,7 +7631,7 @@
           <p:cNvPr id="4" name="Textfeld 3">
             <a:extLst>
               <a:ext uri="{FF2B5EF4-FFF2-40B4-BE49-F238E27FC236}">
-                <a16:creationId xmlns:a16="http://schemas.microsoft.com/office/drawing/2014/main" id="{54366AFF-0868-A621-9ACE-BABA82BFA380}"/>
+                <a16:creationId xmlns:a16="http://schemas.microsoft.com/office/drawing/2014/main" id="{CBF5B1E1-ADE3-06F1-E023-D625B80DBFDD}"/>
               </a:ext>
             </a:extLst>
           </p:cNvPr>
@@ -7177,8 +7640,8 @@
         </p:nvSpPr>
         <p:spPr>
           <a:xfrm>
-            <a:off x="371474" y="142875"/>
-            <a:ext cx="4029075" cy="369332"/>
+            <a:off x="371475" y="142875"/>
+            <a:ext cx="1843088" cy="369332"/>
           </a:xfrm>
           <a:prstGeom prst="rect">
             <a:avLst/>
@@ -7193,39 +7656,45 @@
           <a:p>
             <a:r>
               <a:rPr lang="de-DE" dirty="0"/>
-              <a:t>PCA </a:t>
-            </a:r>
-            <a:r>
-              <a:rPr lang="de-DE" dirty="0" err="1"/>
-              <a:t>with</a:t>
-            </a:r>
-            <a:r>
-              <a:rPr lang="de-DE" dirty="0"/>
-              <a:t> </a:t>
-            </a:r>
-            <a:r>
-              <a:rPr lang="de-DE" dirty="0" err="1"/>
-              <a:t>aligned</a:t>
-            </a:r>
-            <a:r>
-              <a:rPr lang="de-DE" dirty="0"/>
-              <a:t> </a:t>
-            </a:r>
-            <a:r>
-              <a:rPr lang="de-DE" dirty="0" err="1"/>
-              <a:t>reads</a:t>
-            </a:r>
-            <a:r>
-              <a:rPr lang="de-DE" dirty="0"/>
-              <a:t> per sample</a:t>
-            </a:r>
-          </a:p>
-        </p:txBody>
-      </p:sp>
+              <a:t>PC 3 and PC 4</a:t>
+            </a:r>
+          </a:p>
+        </p:txBody>
+      </p:sp>
+      <p:pic>
+        <p:nvPicPr>
+          <p:cNvPr id="7" name="Grafik 6">
+            <a:extLst>
+              <a:ext uri="{FF2B5EF4-FFF2-40B4-BE49-F238E27FC236}">
+                <a16:creationId xmlns:a16="http://schemas.microsoft.com/office/drawing/2014/main" id="{AB8312EF-A912-43DC-CC78-0ACB74AAE02D}"/>
+              </a:ext>
+            </a:extLst>
+          </p:cNvPr>
+          <p:cNvPicPr>
+            <a:picLocks noChangeAspect="1"/>
+          </p:cNvPicPr>
+          <p:nvPr/>
+        </p:nvPicPr>
+        <p:blipFill>
+          <a:blip r:embed="rId3"/>
+          <a:stretch>
+            <a:fillRect/>
+          </a:stretch>
+        </p:blipFill>
+        <p:spPr>
+          <a:xfrm>
+            <a:off x="6429375" y="1607506"/>
+            <a:ext cx="5673113" cy="3580437"/>
+          </a:xfrm>
+          <a:prstGeom prst="rect">
+            <a:avLst/>
+          </a:prstGeom>
+        </p:spPr>
+      </p:pic>
     </p:spTree>
     <p:extLst>
       <p:ext uri="{BB962C8B-B14F-4D97-AF65-F5344CB8AC3E}">
-        <p14:creationId xmlns:p14="http://schemas.microsoft.com/office/powerpoint/2010/main" val="4041535115"/>
+        <p14:creationId xmlns:p14="http://schemas.microsoft.com/office/powerpoint/2010/main" val="547071505"/>
       </p:ext>
     </p:extLst>
   </p:cSld>

--- a/progress.pptx
+++ b/progress.pptx
@@ -5,7 +5,7 @@
     <p:sldMasterId id="2147483648" r:id="rId1"/>
   </p:sldMasterIdLst>
   <p:notesMasterIdLst>
-    <p:notesMasterId r:id="rId14"/>
+    <p:notesMasterId r:id="rId15"/>
   </p:notesMasterIdLst>
   <p:sldIdLst>
     <p:sldId id="261" r:id="rId2"/>
@@ -20,6 +20,7 @@
     <p:sldId id="269" r:id="rId11"/>
     <p:sldId id="270" r:id="rId12"/>
     <p:sldId id="271" r:id="rId13"/>
+    <p:sldId id="273" r:id="rId14"/>
   </p:sldIdLst>
   <p:sldSz cx="12192000" cy="6858000"/>
   <p:notesSz cx="6858000" cy="9144000"/>
@@ -208,7 +209,7 @@
           <a:p>
             <a:fld id="{391F0B43-6B19-1044-8D4F-E46BB78FCD8B}" type="datetimeFigureOut">
               <a:rPr lang="de-DE" smtClean="0"/>
-              <a:t>20.01.25</a:t>
+              <a:t>27.01.25</a:t>
             </a:fld>
             <a:endParaRPr lang="de-DE"/>
           </a:p>
@@ -891,7 +892,7 @@
           <a:p>
             <a:fld id="{B202D3EB-434C-7940-89BB-2B1A6C02241D}" type="datetimeFigureOut">
               <a:rPr lang="de-DE" smtClean="0"/>
-              <a:t>20.01.25</a:t>
+              <a:t>27.01.25</a:t>
             </a:fld>
             <a:endParaRPr lang="de-DE"/>
           </a:p>
@@ -1089,7 +1090,7 @@
           <a:p>
             <a:fld id="{B202D3EB-434C-7940-89BB-2B1A6C02241D}" type="datetimeFigureOut">
               <a:rPr lang="de-DE" smtClean="0"/>
-              <a:t>20.01.25</a:t>
+              <a:t>27.01.25</a:t>
             </a:fld>
             <a:endParaRPr lang="de-DE"/>
           </a:p>
@@ -1297,7 +1298,7 @@
           <a:p>
             <a:fld id="{B202D3EB-434C-7940-89BB-2B1A6C02241D}" type="datetimeFigureOut">
               <a:rPr lang="de-DE" smtClean="0"/>
-              <a:t>20.01.25</a:t>
+              <a:t>27.01.25</a:t>
             </a:fld>
             <a:endParaRPr lang="de-DE"/>
           </a:p>
@@ -1495,7 +1496,7 @@
           <a:p>
             <a:fld id="{B202D3EB-434C-7940-89BB-2B1A6C02241D}" type="datetimeFigureOut">
               <a:rPr lang="de-DE" smtClean="0"/>
-              <a:t>20.01.25</a:t>
+              <a:t>27.01.25</a:t>
             </a:fld>
             <a:endParaRPr lang="de-DE"/>
           </a:p>
@@ -1770,7 +1771,7 @@
           <a:p>
             <a:fld id="{B202D3EB-434C-7940-89BB-2B1A6C02241D}" type="datetimeFigureOut">
               <a:rPr lang="de-DE" smtClean="0"/>
-              <a:t>20.01.25</a:t>
+              <a:t>27.01.25</a:t>
             </a:fld>
             <a:endParaRPr lang="de-DE"/>
           </a:p>
@@ -2035,7 +2036,7 @@
           <a:p>
             <a:fld id="{B202D3EB-434C-7940-89BB-2B1A6C02241D}" type="datetimeFigureOut">
               <a:rPr lang="de-DE" smtClean="0"/>
-              <a:t>20.01.25</a:t>
+              <a:t>27.01.25</a:t>
             </a:fld>
             <a:endParaRPr lang="de-DE"/>
           </a:p>
@@ -2447,7 +2448,7 @@
           <a:p>
             <a:fld id="{B202D3EB-434C-7940-89BB-2B1A6C02241D}" type="datetimeFigureOut">
               <a:rPr lang="de-DE" smtClean="0"/>
-              <a:t>20.01.25</a:t>
+              <a:t>27.01.25</a:t>
             </a:fld>
             <a:endParaRPr lang="de-DE"/>
           </a:p>
@@ -2588,7 +2589,7 @@
           <a:p>
             <a:fld id="{B202D3EB-434C-7940-89BB-2B1A6C02241D}" type="datetimeFigureOut">
               <a:rPr lang="de-DE" smtClean="0"/>
-              <a:t>20.01.25</a:t>
+              <a:t>27.01.25</a:t>
             </a:fld>
             <a:endParaRPr lang="de-DE"/>
           </a:p>
@@ -2701,7 +2702,7 @@
           <a:p>
             <a:fld id="{B202D3EB-434C-7940-89BB-2B1A6C02241D}" type="datetimeFigureOut">
               <a:rPr lang="de-DE" smtClean="0"/>
-              <a:t>20.01.25</a:t>
+              <a:t>27.01.25</a:t>
             </a:fld>
             <a:endParaRPr lang="de-DE"/>
           </a:p>
@@ -3012,7 +3013,7 @@
           <a:p>
             <a:fld id="{B202D3EB-434C-7940-89BB-2B1A6C02241D}" type="datetimeFigureOut">
               <a:rPr lang="de-DE" smtClean="0"/>
-              <a:t>20.01.25</a:t>
+              <a:t>27.01.25</a:t>
             </a:fld>
             <a:endParaRPr lang="de-DE"/>
           </a:p>
@@ -3300,7 +3301,7 @@
           <a:p>
             <a:fld id="{B202D3EB-434C-7940-89BB-2B1A6C02241D}" type="datetimeFigureOut">
               <a:rPr lang="de-DE" smtClean="0"/>
-              <a:t>20.01.25</a:t>
+              <a:t>27.01.25</a:t>
             </a:fld>
             <a:endParaRPr lang="de-DE"/>
           </a:p>
@@ -3541,7 +3542,7 @@
           <a:p>
             <a:fld id="{B202D3EB-434C-7940-89BB-2B1A6C02241D}" type="datetimeFigureOut">
               <a:rPr lang="de-DE" smtClean="0"/>
-              <a:t>20.01.25</a:t>
+              <a:t>27.01.25</a:t>
             </a:fld>
             <a:endParaRPr lang="de-DE"/>
           </a:p>
@@ -5264,6 +5265,36 @@
     <p:extLst>
       <p:ext uri="{BB962C8B-B14F-4D97-AF65-F5344CB8AC3E}">
         <p14:creationId xmlns:p14="http://schemas.microsoft.com/office/powerpoint/2010/main" val="3152487584"/>
+      </p:ext>
+    </p:extLst>
+  </p:cSld>
+  <p:clrMapOvr>
+    <a:masterClrMapping/>
+  </p:clrMapOvr>
+</p:sld>
+</file>
+
+<file path=ppt/slides/slide13.xml><?xml version="1.0" encoding="utf-8"?>
+<p:sld xmlns:a="http://schemas.openxmlformats.org/drawingml/2006/main" xmlns:r="http://schemas.openxmlformats.org/officeDocument/2006/relationships" xmlns:p="http://schemas.openxmlformats.org/presentationml/2006/main">
+  <p:cSld>
+    <p:spTree>
+      <p:nvGrpSpPr>
+        <p:cNvPr id="1" name=""/>
+        <p:cNvGrpSpPr/>
+        <p:nvPr/>
+      </p:nvGrpSpPr>
+      <p:grpSpPr>
+        <a:xfrm>
+          <a:off x="0" y="0"/>
+          <a:ext cx="0" cy="0"/>
+          <a:chOff x="0" y="0"/>
+          <a:chExt cx="0" cy="0"/>
+        </a:xfrm>
+      </p:grpSpPr>
+    </p:spTree>
+    <p:extLst>
+      <p:ext uri="{BB962C8B-B14F-4D97-AF65-F5344CB8AC3E}">
+        <p14:creationId xmlns:p14="http://schemas.microsoft.com/office/powerpoint/2010/main" val="1686439885"/>
       </p:ext>
     </p:extLst>
   </p:cSld>
